--- a/docs/交付文档/智能体挑战赛路演PPT（标签智能体）-20260930.pptx
+++ b/docs/交付文档/智能体挑战赛路演PPT（标签智能体）-20260930.pptx
@@ -2833,7 +2833,7 @@
         <a:spcBef>
           <a:spcPct val="20000"/>
         </a:spcBef>
-        <a:buFont typeface="Arial" panose="020B0604020202020204"/>
+        <a:buFont typeface="Arial" panose="020B0604020202090204"/>
         <a:buChar char="•"/>
         <a:defRPr sz="3200" kern="1200">
           <a:solidFill>
@@ -2848,7 +2848,7 @@
         <a:spcBef>
           <a:spcPct val="20000"/>
         </a:spcBef>
-        <a:buFont typeface="Arial" panose="020B0604020202020204"/>
+        <a:buFont typeface="Arial" panose="020B0604020202090204"/>
         <a:buChar char="–"/>
         <a:defRPr sz="2800" kern="1200">
           <a:solidFill>
@@ -2863,7 +2863,7 @@
         <a:spcBef>
           <a:spcPct val="20000"/>
         </a:spcBef>
-        <a:buFont typeface="Arial" panose="020B0604020202020204"/>
+        <a:buFont typeface="Arial" panose="020B0604020202090204"/>
         <a:buChar char="•"/>
         <a:defRPr sz="2400" kern="1200">
           <a:solidFill>
@@ -2878,7 +2878,7 @@
         <a:spcBef>
           <a:spcPct val="20000"/>
         </a:spcBef>
-        <a:buFont typeface="Arial" panose="020B0604020202020204"/>
+        <a:buFont typeface="Arial" panose="020B0604020202090204"/>
         <a:buChar char="–"/>
         <a:defRPr sz="2000" kern="1200">
           <a:solidFill>
@@ -2893,7 +2893,7 @@
         <a:spcBef>
           <a:spcPct val="20000"/>
         </a:spcBef>
-        <a:buFont typeface="Arial" panose="020B0604020202020204"/>
+        <a:buFont typeface="Arial" panose="020B0604020202090204"/>
         <a:buChar char="»"/>
         <a:defRPr sz="2000" kern="1200">
           <a:solidFill>
@@ -2908,7 +2908,7 @@
         <a:spcBef>
           <a:spcPct val="20000"/>
         </a:spcBef>
-        <a:buFont typeface="Arial" panose="020B0604020202020204"/>
+        <a:buFont typeface="Arial" panose="020B0604020202090204"/>
         <a:buChar char="•"/>
         <a:defRPr sz="2000" kern="1200">
           <a:solidFill>
@@ -2923,7 +2923,7 @@
         <a:spcBef>
           <a:spcPct val="20000"/>
         </a:spcBef>
-        <a:buFont typeface="Arial" panose="020B0604020202020204"/>
+        <a:buFont typeface="Arial" panose="020B0604020202090204"/>
         <a:buChar char="•"/>
         <a:defRPr sz="2000" kern="1200">
           <a:solidFill>
@@ -2938,7 +2938,7 @@
         <a:spcBef>
           <a:spcPct val="20000"/>
         </a:spcBef>
-        <a:buFont typeface="Arial" panose="020B0604020202020204"/>
+        <a:buFont typeface="Arial" panose="020B0604020202090204"/>
         <a:buChar char="•"/>
         <a:defRPr sz="2000" kern="1200">
           <a:solidFill>
@@ -2953,7 +2953,7 @@
         <a:spcBef>
           <a:spcPct val="20000"/>
         </a:spcBef>
-        <a:buFont typeface="Arial" panose="020B0604020202020204"/>
+        <a:buFont typeface="Arial" panose="020B0604020202090204"/>
         <a:buChar char="•"/>
         <a:defRPr sz="2000" kern="1200">
           <a:solidFill>
